--- a/deliverables/VIDEO_6_Before_You_Take_An_Internal_Role_FINAL/Recording_Support_Deck.pptx
+++ b/deliverables/VIDEO_6_Before_You_Take_An_Internal_Role_FINAL/Recording_Support_Deck.pptx
@@ -516,19 +516,25 @@
           <a:p/>
           <a:p>
             <a:r>
-              <a:t>On screen: NEW TITLE, SAME WORK? / Same company does not automatically mean useful growth.</a:t>
+              <a:t>Status: COPY UPDATE</a:t>
             </a:r>
           </a:p>
           <a:p/>
           <a:p>
             <a:r>
-              <a:t>Script: "An internal move can look safe because the logo does not change. That is exactly why it can fool you."</a:t>
+              <a:t>On screen: NEW TITLE, SAME WORK? / A YEAR FROM NOW, WHAT CAN YOU DO, DECIDE, OR PROVE?</a:t>
             </a:r>
           </a:p>
           <a:p/>
           <a:p>
             <a:r>
-              <a:t>Purpose: The central tension, and the thumbnail line, on screen in the first thirty seconds.</a:t>
+              <a:t>Script: A year from now, what will I be able to do, decide, or prove that I cannot do today?</a:t>
+            </a:r>
+          </a:p>
+          <a:p/>
+          <a:p>
+            <a:r>
+              <a:t>Purpose: The central tension and the thumbnail line, landing on the decision moment rather than on the concept of internal mobility.</a:t>
             </a:r>
           </a:p>
           <a:p>
@@ -609,13 +615,19 @@
           <a:p/>
           <a:p>
             <a:r>
+              <a:t>Status: REUSE</a:t>
+            </a:r>
+          </a:p>
+          <a:p/>
+          <a:p>
+            <a:r>
               <a:t>On screen: 1 WILL THE WORK CHANGE? / 2 WILL MY JUDGMENT EXPAND? / 3 WILL THE EVIDENCE TRAVEL?</a:t>
             </a:r>
           </a:p>
           <a:p/>
           <a:p>
             <a:r>
-              <a:t>Script: "Before you take an internal role, ask three questions."</a:t>
+              <a:t>Script: Before you take it, test three things:</a:t>
             </a:r>
           </a:p>
           <a:p/>
@@ -702,24 +714,30 @@
           <a:p/>
           <a:p>
             <a:r>
-              <a:t>On screen: WHAT WILL BE DIFFERENT ON AN ORDINARY MONDAY? / Problems, Systems, Stakeholders, Context</a:t>
+              <a:t>Status: REUSE</a:t>
             </a:r>
           </a:p>
           <a:p/>
           <a:p>
             <a:r>
-              <a:t>Script: "Start with the most concrete question: What will actually be different on an ordinary Monday?"</a:t>
+              <a:t>On screen: WHAT WILL BE DIFFERENT ON AN ORDINARY MONDAY? / Problems · Systems · Stakeholders · Context</a:t>
             </a:r>
           </a:p>
           <a:p/>
           <a:p>
             <a:r>
-              <a:t>Purpose: The most concrete question in the video, with the four things to look for as one readable line rather than four small boxes.</a:t>
-            </a:r>
-          </a:p>
-          <a:p>
-            <a:r>
-              <a:t>Hold: 6 to 7 seconds</a:t>
+              <a:t>Script: Start with the most concrete question: What will actually be different on an ordinary Monday?</a:t>
+            </a:r>
+          </a:p>
+          <a:p/>
+          <a:p>
+            <a:r>
+              <a:t>Purpose: Turns question one into something the viewer can actually test.</a:t>
+            </a:r>
+          </a:p>
+          <a:p>
+            <a:r>
+              <a:t>Hold: 7 to 8 seconds</a:t>
             </a:r>
           </a:p>
         </p:txBody>
@@ -795,19 +813,25 @@
           <a:p/>
           <a:p>
             <a:r>
-              <a:t>On screen: MORE TASKS: Volume, Coordination, Absorption  /  MORE JUDGMENT: Interpretation, Tradeoffs, Consequence</a:t>
+              <a:t>Status: REUSE</a:t>
             </a:r>
           </a:p>
           <a:p/>
           <a:p>
             <a:r>
-              <a:t>Script: "More tasks can mean volume, coordination, and absorption. More judgment means you have to interpret incomplete information."</a:t>
+              <a:t>On screen: MORE TASKS: Volume, Coordination, Absorption / MORE JUDGMENT: Interpretation, Tradeoffs, Consequence</a:t>
             </a:r>
           </a:p>
           <a:p/>
           <a:p>
             <a:r>
-              <a:t>Purpose: The distinction dependable people most often get wrong.</a:t>
+              <a:t>Script: More tasks can mean volume, coordination, and absorption.</a:t>
+            </a:r>
+          </a:p>
+          <a:p/>
+          <a:p>
+            <a:r>
+              <a:t>Purpose: The distinction question two turns on.</a:t>
             </a:r>
           </a:p>
           <a:p>
@@ -888,19 +912,25 @@
           <a:p/>
           <a:p>
             <a:r>
-              <a:t>On screen: RESULT: What changed?  /  JUDGMENT: What did you notice or decide?  /  RANGE: What new context can you now handle?</a:t>
+              <a:t>Status: REUSE</a:t>
             </a:r>
           </a:p>
           <a:p/>
           <a:p>
             <a:r>
-              <a:t>Script: "I would look for three kinds of evidence: result, judgment, and range."</a:t>
+              <a:t>On screen: RESULT: what changed? / JUDGMENT: what did you notice or decide? / RANGE: what new context can you handle?</a:t>
             </a:r>
           </a:p>
           <a:p/>
           <a:p>
             <a:r>
-              <a:t>Purpose: Defines portable evidence without suggesting anything confidential is taken.</a:t>
+              <a:t>Script: I would look for three kinds of evidence: result, judgment, and range.</a:t>
+            </a:r>
+          </a:p>
+          <a:p/>
+          <a:p>
+            <a:r>
+              <a:t>Purpose: The three kinds of evidence, each with the question that produces it.</a:t>
             </a:r>
           </a:p>
           <a:p>
@@ -981,19 +1011,25 @@
           <a:p/>
           <a:p>
             <a:r>
-              <a:t>On screen: 3 YES: Strong growth case / 2 YES: Investigate or negotiate / 0-1 YES: May be movement without much growth</a:t>
+              <a:t>Status: COPY UPDATE</a:t>
             </a:r>
           </a:p>
           <a:p/>
           <a:p>
             <a:r>
-              <a:t>Script: "Now put the three answers together."</a:t>
+              <a:t>On screen: 3 YES: Strong developmental case / 2 YES: Investigate or negotiate / 0-1 YES: May be movement without much growth</a:t>
             </a:r>
           </a:p>
           <a:p/>
           <a:p>
             <a:r>
-              <a:t>Purpose: Gives the viewer a way to read their own result.</a:t>
+              <a:t>Script: If all three are yes, different work, expanded judgment, and evidence that travels, the developmental case is strong.</a:t>
+            </a:r>
+          </a:p>
+          <a:p/>
+          <a:p>
+            <a:r>
+              <a:t>Purpose: The read, in the script's own language, without turning a judgment call into a score.</a:t>
             </a:r>
           </a:p>
           <a:p>
@@ -1074,19 +1110,25 @@
           <a:p/>
           <a:p>
             <a:r>
-              <a:t>On screen: What problems will I own? / Which decisions belong to me? / How will success be measured?</a:t>
+              <a:t>Status: COPY UPDATE</a:t>
             </a:r>
           </a:p>
           <a:p/>
           <a:p>
             <a:r>
-              <a:t>Script: "Before you accept the opportunity, ask..."</a:t>
+              <a:t>On screen: What problems will I own? / Which decisions belong to this role? / How will success be measured?</a:t>
             </a:r>
           </a:p>
           <a:p/>
           <a:p>
             <a:r>
-              <a:t>Purpose: The questions to take into the internal conversation.</a:t>
+              <a:t>Script: Ask the internal hiring manager three things:</a:t>
+            </a:r>
+          </a:p>
+          <a:p/>
+          <a:p>
+            <a:r>
+              <a:t>Purpose: Turns the video into something the viewer can take into a conversation.</a:t>
             </a:r>
           </a:p>
           <a:p>
@@ -1167,19 +1209,25 @@
           <a:p/>
           <a:p>
             <a:r>
+              <a:t>Status: REUSE</a:t>
+            </a:r>
+          </a:p>
+          <a:p/>
+          <a:p>
+            <a:r>
               <a:t>On screen: FREE CAREER DECISION EVIDENCE CHECK / temidayoafonja.com/career-decisions</a:t>
             </a:r>
           </a:p>
           <a:p/>
           <a:p>
             <a:r>
-              <a:t>Script: "the free Career Decision Evidence Check gives you a structured way to read the evidence behind that choice. It is linked below."</a:t>
+              <a:t>Script: the free Career Decision Evidence Check gives you a structured way to read the evidence behind that choice</a:t>
             </a:r>
           </a:p>
           <a:p/>
           <a:p>
             <a:r>
-              <a:t>Purpose: The single product route in this video.</a:t>
+              <a:t>Purpose: The single product route, full screen, with the address large enough to read on a phone.</a:t>
             </a:r>
           </a:p>
           <a:p>
@@ -1260,19 +1308,25 @@
           <a:p/>
           <a:p>
             <a:r>
+              <a:t>Status: REUSE</a:t>
+            </a:r>
+          </a:p>
+          <a:p/>
+          <a:p>
+            <a:r>
               <a:t>On screen: WATCH NEXT: ARE YOU GROWING, OR JUST BEING GIVEN MORE WORK?</a:t>
             </a:r>
           </a:p>
           <a:p/>
           <a:p>
             <a:r>
-              <a:t>Script: "That is what we are testing next in Are You Growing, or Just Being Given More Work?"</a:t>
+              <a:t>Script: That is what we are testing next in “Are You Growing, or Just Being Given More Work?”</a:t>
             </a:r>
           </a:p>
           <a:p/>
           <a:p>
             <a:r>
-              <a:t>Purpose: Final visual. Right of frame kept clear for the clickable YouTube end-screen element.</a:t>
+              <a:t>Purpose: Final visual. Right of frame kept clear for the clickable end-screen element.</a:t>
             </a:r>
           </a:p>
           <a:p>
@@ -4335,7 +4389,7 @@
         </p:nvSpPr>
         <p:spPr>
           <a:xfrm>
-            <a:off x="1016000" y="1947291"/>
+            <a:off x="1016000" y="2187321"/>
             <a:ext cx="10160000" cy="1524000"/>
           </a:xfrm>
           <a:prstGeom prst="rect">
@@ -4388,7 +4442,7 @@
         </p:nvSpPr>
         <p:spPr>
           <a:xfrm>
-            <a:off x="1016000" y="3832479"/>
+            <a:off x="1016000" y="4072509"/>
             <a:ext cx="10160000" cy="1524000"/>
           </a:xfrm>
           <a:prstGeom prst="rect">
@@ -4408,7 +4462,7 @@
               </a:lnSpc>
             </a:pPr>
             <a:r>
-              <a:rPr sz="2700" b="0" i="0">
+              <a:rPr sz="2600" b="0" i="0">
                 <a:solidFill>
                   <a:srgbClr val="B9C3D2"/>
                 </a:solidFill>
@@ -4416,7 +4470,7 @@
                 <a:ea typeface="DM Sans"/>
                 <a:cs typeface="DM Sans"/>
               </a:rPr>
-              <a:t>Same company does not automatically mean useful growth.</a:t>
+              <a:t>A year from now, what can you do, decide, or prove?</a:t>
             </a:r>
           </a:p>
         </p:txBody>
@@ -6194,7 +6248,7 @@
                 <a:ea typeface="Montserrat"/>
                 <a:cs typeface="Montserrat"/>
               </a:rPr>
-              <a:t>Strong growth case.</a:t>
+              <a:t>Strong developmental case.</a:t>
             </a:r>
           </a:p>
         </p:txBody>
@@ -6669,7 +6723,7 @@
                 <a:ea typeface="Montserrat"/>
                 <a:cs typeface="Montserrat"/>
               </a:rPr>
-              <a:t>Which decisions belong to me?</a:t>
+              <a:t>Which decisions belong to this role?</a:t>
             </a:r>
           </a:p>
         </p:txBody>
